--- a/examples/showcase/_out/04_animations.pptx
+++ b/examples/showcase/_out/04_animations.pptx
@@ -4113,6 +4113,97 @@
   <p:transition xmlns:ns0="http://schemas.microsoft.com/office/powerpoint/2010/main" ns0:dur="400">
     <p:fade/>
   </p:transition>
+  <p:timing>
+    <p:tnLst>
+      <p:par>
+        <p:cTn id="1" dur="indefinite" restart="never" nodeType="tmRoot">
+          <p:childTnLst>
+            <p:par>
+              <p:cTn fill="hold" id="2">
+                <p:stCondLst>
+                  <p:cond delay="indefinite"/>
+                </p:stCondLst>
+                <p:childTnLst>
+                  <p:par>
+                    <p:cTn id="3" presetID="13" presetClass="emph" presetSubtype="0" fill="hold" grpId="0" nodeType="clickEffect">
+                      <p:stCondLst>
+                        <p:cond delay="0"/>
+                      </p:stCondLst>
+                      <p:childTnLst>
+                        <p:animScale>
+                          <p:cBhvr>
+                            <p:cTn id="4" dur="300" autoRev="1"/>
+                            <p:tgtEl>
+                              <p:spTgt spid="3"/>
+                            </p:tgtEl>
+                          </p:cBhvr>
+                          <p:by x="133333" y="133333"/>
+                        </p:animScale>
+                      </p:childTnLst>
+                    </p:cTn>
+                  </p:par>
+                </p:childTnLst>
+              </p:cTn>
+            </p:par>
+            <p:par>
+              <p:cTn fill="hold" id="5">
+                <p:stCondLst>
+                  <p:cond delay="0"/>
+                </p:stCondLst>
+                <p:childTnLst>
+                  <p:par>
+                    <p:cTn id="6" presetID="13" presetClass="emph" presetSubtype="0" fill="hold" grpId="0" nodeType="afterEffect">
+                      <p:stCondLst>
+                        <p:cond delay="0"/>
+                      </p:stCondLst>
+                      <p:childTnLst>
+                        <p:animScale>
+                          <p:cBhvr>
+                            <p:cTn id="7" dur="300" autoRev="1"/>
+                            <p:tgtEl>
+                              <p:spTgt spid="7"/>
+                            </p:tgtEl>
+                          </p:cBhvr>
+                          <p:by x="133333" y="133333"/>
+                        </p:animScale>
+                      </p:childTnLst>
+                    </p:cTn>
+                  </p:par>
+                </p:childTnLst>
+              </p:cTn>
+            </p:par>
+            <p:par>
+              <p:cTn fill="hold" id="8">
+                <p:stCondLst>
+                  <p:cond delay="0"/>
+                </p:stCondLst>
+                <p:childTnLst>
+                  <p:par>
+                    <p:cTn id="9" presetID="13" presetClass="emph" presetSubtype="0" fill="hold" grpId="0" nodeType="afterEffect">
+                      <p:stCondLst>
+                        <p:cond delay="0"/>
+                      </p:stCondLst>
+                      <p:childTnLst>
+                        <p:animScale>
+                          <p:cBhvr>
+                            <p:cTn id="10" dur="300" autoRev="1"/>
+                            <p:tgtEl>
+                              <p:spTgt spid="11"/>
+                            </p:tgtEl>
+                          </p:cBhvr>
+                          <p:by x="133333" y="133333"/>
+                        </p:animScale>
+                      </p:childTnLst>
+                    </p:cTn>
+                  </p:par>
+                </p:childTnLst>
+              </p:cTn>
+            </p:par>
+          </p:childTnLst>
+        </p:cTn>
+      </p:par>
+    </p:tnLst>
+  </p:timing>
 </p:sld>
 </file>
 
@@ -4206,15 +4297,13 @@
           <a:bodyPr rtlCol="0" anchor="ctr"/>
           <a:lstStyle/>
           <a:p>
-            <a:pPr algn="ctr">
-              <a:defRPr b="1" sz="2800">
+            <a:pPr algn="ctr"/>
+            <a:r>
+              <a:rPr b="1" sz="2800">
                 <a:solidFill>
                   <a:srgbClr val="FFFFFF"/>
                 </a:solidFill>
-              </a:defRPr>
-            </a:pPr>
-            <a:r>
-              <a:rPr/>
+              </a:rPr>
               <a:t>Go</a:t>
             </a:r>
           </a:p>
